--- a/figures/Socioecological_Model_Final.pptx
+++ b/figures/Socioecological_Model_Final.pptx
@@ -883,18 +883,20 @@
         </p:nvSpPr>
         <p:spPr>
           <a:xfrm>
-            <a:off x="685800" y="834390"/>
-            <a:ext cx="7772400" cy="3474720"/>
+            <a:off x="457200" y="274320"/>
+            <a:ext cx="8229600" cy="4754880"/>
           </a:xfrm>
-          <a:prstGeom prst="ellipse">
-            <a:avLst/>
+          <a:prstGeom prst="roundRect">
+            <a:avLst>
+              <a:gd name="adj" fmla="val 5769"/>
+            </a:avLst>
           </a:prstGeom>
           <a:solidFill>
             <a:srgbClr val="5B9BD5"/>
           </a:solidFill>
           <a:ln w="38100">
             <a:solidFill>
-              <a:srgbClr val="FFFFFF"/>
+              <a:srgbClr val="2E5C8A"/>
             </a:solidFill>
             <a:prstDash val="solid"/>
           </a:ln>
@@ -908,18 +910,20 @@
         </p:nvSpPr>
         <p:spPr>
           <a:xfrm>
-            <a:off x="1828800" y="1291590"/>
-            <a:ext cx="5486400" cy="2560320"/>
+            <a:off x="1371600" y="1005840"/>
+            <a:ext cx="6400800" cy="3474720"/>
           </a:xfrm>
-          <a:prstGeom prst="ellipse">
-            <a:avLst/>
+          <a:prstGeom prst="roundRect">
+            <a:avLst>
+              <a:gd name="adj" fmla="val 6579"/>
+            </a:avLst>
           </a:prstGeom>
           <a:solidFill>
-            <a:srgbClr val="9BC2E6"/>
+            <a:srgbClr val="8BB4D9"/>
           </a:solidFill>
           <a:ln w="38100">
             <a:solidFill>
-              <a:srgbClr val="FFFFFF"/>
+              <a:srgbClr val="5B9BD5"/>
             </a:solidFill>
             <a:prstDash val="solid"/>
           </a:ln>
@@ -933,18 +937,20 @@
         </p:nvSpPr>
         <p:spPr>
           <a:xfrm>
-            <a:off x="2971800" y="1748790"/>
-            <a:ext cx="3200400" cy="1645920"/>
+            <a:off x="2286000" y="1828800"/>
+            <a:ext cx="4572000" cy="2011680"/>
           </a:xfrm>
-          <a:prstGeom prst="ellipse">
-            <a:avLst/>
+          <a:prstGeom prst="roundRect">
+            <a:avLst>
+              <a:gd name="adj" fmla="val 9091"/>
+            </a:avLst>
           </a:prstGeom>
           <a:solidFill>
-            <a:srgbClr val="DEEAF6"/>
+            <a:srgbClr val="B4D4E8"/>
           </a:solidFill>
           <a:ln w="38100">
             <a:solidFill>
-              <a:srgbClr val="FFFFFF"/>
+              <a:srgbClr val="8BB4D9"/>
             </a:solidFill>
             <a:prstDash val="solid"/>
           </a:ln>
@@ -958,8 +964,8 @@
         </p:nvSpPr>
         <p:spPr>
           <a:xfrm>
-            <a:off x="2971800" y="1748790"/>
-            <a:ext cx="3200400" cy="1645920"/>
+            <a:off x="457200" y="365760"/>
+            <a:ext cx="8229600" cy="457200"/>
           </a:xfrm>
           <a:prstGeom prst="rect">
             <a:avLst/>
@@ -975,68 +981,14 @@
               <a:buNone/>
             </a:pPr>
             <a:r>
-              <a:rPr lang="en-US" sz="1600" b="1" dirty="0">
-                <a:solidFill>
-                  <a:srgbClr val="000000"/>
-                </a:solidFill>
-              </a:rPr>
-              <a:t>Personal
-</a:t>
-            </a:r>
-            <a:endParaRPr lang="en-US" sz="1600" dirty="0"/>
-          </a:p>
-          <a:p>
-            <a:pPr algn="ctr" indent="0" marL="0">
-              <a:buNone/>
-            </a:pPr>
-            <a:r>
-              <a:rPr lang="en-US" sz="1600" dirty="0">
-                <a:solidFill>
-                  <a:srgbClr val="000000"/>
-                </a:solidFill>
-              </a:rPr>
-              <a:t>
-</a:t>
-            </a:r>
-            <a:endParaRPr lang="en-US" sz="1600" dirty="0"/>
-          </a:p>
-          <a:p>
-            <a:pPr algn="ctr" indent="0" marL="0">
-              <a:buNone/>
-            </a:pPr>
-            <a:r>
-              <a:rPr lang="en-US" sz="1100" dirty="0">
-                <a:solidFill>
-                  <a:srgbClr val="000000"/>
-                </a:solidFill>
-              </a:rPr>
-              <a:t>•  Individual preferences
-</a:t>
-            </a:r>
-            <a:pPr algn="ctr" indent="0" marL="0">
-              <a:buNone/>
-            </a:pPr>
-            <a:r>
-              <a:rPr lang="en-US" sz="1100" dirty="0">
-                <a:solidFill>
-                  <a:srgbClr val="000000"/>
-                </a:solidFill>
-              </a:rPr>
-              <a:t>•  Clinical eligibility
-</a:t>
-            </a:r>
-            <a:pPr algn="ctr" indent="0" marL="0">
-              <a:buNone/>
-            </a:pPr>
-            <a:r>
-              <a:rPr lang="en-US" sz="1100" dirty="0">
-                <a:solidFill>
-                  <a:srgbClr val="000000"/>
-                </a:solidFill>
-              </a:rPr>
-              <a:t>•  Body image concerns</a:t>
-            </a:r>
-            <a:endParaRPr lang="en-US" sz="1600" dirty="0"/>
+              <a:rPr lang="en-US" sz="2400" b="1" dirty="0">
+                <a:solidFill>
+                  <a:srgbClr val="000000"/>
+                </a:solidFill>
+              </a:rPr>
+              <a:t>Systemic</a:t>
+            </a:r>
+            <a:endParaRPr lang="en-US" sz="2400" dirty="0"/>
           </a:p>
         </p:txBody>
       </p:sp>
@@ -1048,8 +1000,8 @@
         </p:nvSpPr>
         <p:spPr>
           <a:xfrm>
-            <a:off x="5303520" y="1474470"/>
-            <a:ext cx="2286000" cy="2194560"/>
+            <a:off x="640080" y="868680"/>
+            <a:ext cx="3657600" cy="365760"/>
           </a:xfrm>
           <a:prstGeom prst="rect">
             <a:avLst/>
@@ -1070,97 +1022,7 @@
                   <a:srgbClr val="000000"/>
                 </a:solidFill>
               </a:rPr>
-              <a:t>Interpersonal
-</a:t>
-            </a:r>
-            <a:endParaRPr lang="en-US" sz="1600" dirty="0"/>
-          </a:p>
-          <a:p>
-            <a:pPr algn="l" indent="0" marL="0">
-              <a:buNone/>
-            </a:pPr>
-            <a:r>
-              <a:rPr lang="en-US" sz="1600" dirty="0">
-                <a:solidFill>
-                  <a:srgbClr val="000000"/>
-                </a:solidFill>
-              </a:rPr>
-              <a:t>
-</a:t>
-            </a:r>
-            <a:endParaRPr lang="en-US" sz="1600" dirty="0"/>
-          </a:p>
-          <a:p>
-            <a:pPr algn="l" indent="0" marL="0">
-              <a:buNone/>
-            </a:pPr>
-            <a:r>
-              <a:rPr lang="en-US" sz="1100" dirty="0">
-                <a:solidFill>
-                  <a:srgbClr val="000000"/>
-                </a:solidFill>
-              </a:rPr>
-              <a:t>•  Patient-Provider
-</a:t>
-            </a:r>
-            <a:pPr algn="l" indent="0" marL="0">
-              <a:buNone/>
-            </a:pPr>
-            <a:r>
-              <a:rPr lang="en-US" sz="1100" dirty="0">
-                <a:solidFill>
-                  <a:srgbClr val="000000"/>
-                </a:solidFill>
-              </a:rPr>
-              <a:t>    Communication
-</a:t>
-            </a:r>
-            <a:pPr algn="l" indent="0" marL="0">
-              <a:buNone/>
-            </a:pPr>
-            <a:r>
-              <a:rPr lang="en-US" sz="1100" dirty="0">
-                <a:solidFill>
-                  <a:srgbClr val="000000"/>
-                </a:solidFill>
-              </a:rPr>
-              <a:t>•  Information quality
-</a:t>
-            </a:r>
-            <a:pPr algn="l" indent="0" marL="0">
-              <a:buNone/>
-            </a:pPr>
-            <a:r>
-              <a:rPr lang="en-US" sz="1100" dirty="0">
-                <a:solidFill>
-                  <a:srgbClr val="000000"/>
-                </a:solidFill>
-              </a:rPr>
-              <a:t>•  Consultation time
-</a:t>
-            </a:r>
-            <a:pPr algn="l" indent="0" marL="0">
-              <a:buNone/>
-            </a:pPr>
-            <a:r>
-              <a:rPr lang="en-US" sz="1100" dirty="0">
-                <a:solidFill>
-                  <a:srgbClr val="000000"/>
-                </a:solidFill>
-              </a:rPr>
-              <a:t>•  Visual representation
-</a:t>
-            </a:r>
-            <a:pPr algn="l" indent="0" marL="0">
-              <a:buNone/>
-            </a:pPr>
-            <a:r>
-              <a:rPr lang="en-US" sz="1100" dirty="0">
-                <a:solidFill>
-                  <a:srgbClr val="000000"/>
-                </a:solidFill>
-              </a:rPr>
-              <a:t>•  Communication style</a:t>
+              <a:t>Financial Toxicity</a:t>
             </a:r>
             <a:endParaRPr lang="en-US" sz="1600" dirty="0"/>
           </a:p>
@@ -1174,8 +1036,8 @@
         </p:nvSpPr>
         <p:spPr>
           <a:xfrm>
-            <a:off x="7132320" y="925830"/>
-            <a:ext cx="1828800" cy="365760"/>
+            <a:off x="640080" y="1280160"/>
+            <a:ext cx="3657600" cy="2011680"/>
           </a:xfrm>
           <a:prstGeom prst="rect">
             <a:avLst/>
@@ -1187,18 +1049,96 @@
           <a:bodyPr wrap="square" rtlCol="0" anchor="ctr"/>
           <a:lstStyle/>
           <a:p>
-            <a:pPr algn="ctr" indent="0" marL="0">
-              <a:buNone/>
-            </a:pPr>
-            <a:r>
-              <a:rPr lang="en-US" sz="1800" b="1" dirty="0">
-                <a:solidFill>
-                  <a:srgbClr val="000000"/>
-                </a:solidFill>
-              </a:rPr>
-              <a:t>Systemic</a:t>
-            </a:r>
-            <a:endParaRPr lang="en-US" sz="1800" dirty="0"/>
+            <a:pPr indent="0" marL="0">
+              <a:lnSpc>
+                <a:spcPts val="1600"/>
+              </a:lnSpc>
+              <a:buNone/>
+            </a:pPr>
+            <a:r>
+              <a:rPr lang="en-US" sz="1200" dirty="0">
+                <a:solidFill>
+                  <a:srgbClr val="000000"/>
+                </a:solidFill>
+              </a:rPr>
+              <a:t>• Extended time off work
+</a:t>
+            </a:r>
+            <a:pPr indent="0" marL="0">
+              <a:lnSpc>
+                <a:spcPts val="1600"/>
+              </a:lnSpc>
+              <a:buNone/>
+            </a:pPr>
+            <a:r>
+              <a:rPr lang="en-US" sz="1200" dirty="0">
+                <a:solidFill>
+                  <a:srgbClr val="000000"/>
+                </a:solidFill>
+              </a:rPr>
+              <a:t>• Lost income and savings
+</a:t>
+            </a:r>
+            <a:pPr indent="0" marL="0">
+              <a:lnSpc>
+                <a:spcPts val="1600"/>
+              </a:lnSpc>
+              <a:buNone/>
+            </a:pPr>
+            <a:r>
+              <a:rPr lang="en-US" sz="1200" dirty="0">
+                <a:solidFill>
+                  <a:srgbClr val="000000"/>
+                </a:solidFill>
+              </a:rPr>
+              <a:t>• Recovery time exceeds
+</a:t>
+            </a:r>
+            <a:pPr indent="0" marL="0">
+              <a:lnSpc>
+                <a:spcPts val="1600"/>
+              </a:lnSpc>
+              <a:buNone/>
+            </a:pPr>
+            <a:r>
+              <a:rPr lang="en-US" sz="1100" dirty="0">
+                <a:solidFill>
+                  <a:srgbClr val="000000"/>
+                </a:solidFill>
+              </a:rPr>
+              <a:t>   expectations
+</a:t>
+            </a:r>
+            <a:pPr indent="0" marL="0">
+              <a:lnSpc>
+                <a:spcPts val="1600"/>
+              </a:lnSpc>
+              <a:buNone/>
+            </a:pPr>
+            <a:r>
+              <a:rPr lang="en-US" sz="1200" dirty="0">
+                <a:solidFill>
+                  <a:srgbClr val="000000"/>
+                </a:solidFill>
+              </a:rPr>
+              <a:t>• Hidden costs (childcare,
+</a:t>
+            </a:r>
+            <a:pPr indent="0" marL="0">
+              <a:lnSpc>
+                <a:spcPts val="1600"/>
+              </a:lnSpc>
+              <a:buNone/>
+            </a:pPr>
+            <a:r>
+              <a:rPr lang="en-US" sz="1100" dirty="0">
+                <a:solidFill>
+                  <a:srgbClr val="000000"/>
+                </a:solidFill>
+              </a:rPr>
+              <a:t>   transportation)</a:t>
+            </a:r>
+            <a:endParaRPr lang="en-US" sz="1200" dirty="0"/>
           </a:p>
         </p:txBody>
       </p:sp>
@@ -1210,8 +1150,8 @@
         </p:nvSpPr>
         <p:spPr>
           <a:xfrm>
-            <a:off x="6858000" y="1474470"/>
-            <a:ext cx="2011680" cy="1280160"/>
+            <a:off x="4846320" y="868680"/>
+            <a:ext cx="3657600" cy="365760"/>
           </a:xfrm>
           <a:prstGeom prst="rect">
             <a:avLst/>
@@ -1220,99 +1160,21 @@
           <a:ln/>
         </p:spPr>
         <p:txBody>
-          <a:bodyPr wrap="square" rtlCol="0" anchor="t"/>
+          <a:bodyPr wrap="square" rtlCol="0" anchor="ctr"/>
           <a:lstStyle/>
           <a:p>
             <a:pPr algn="l" indent="0" marL="0">
               <a:buNone/>
             </a:pPr>
             <a:r>
-              <a:rPr lang="en-US" sz="1400" b="1" dirty="0">
-                <a:solidFill>
-                  <a:srgbClr val="000000"/>
-                </a:solidFill>
-              </a:rPr>
-              <a:t>Financial Toxicity
-</a:t>
-            </a:r>
-            <a:endParaRPr lang="en-US" sz="1400" dirty="0"/>
-          </a:p>
-          <a:p>
-            <a:pPr algn="l" indent="0" marL="0">
-              <a:buNone/>
-            </a:pPr>
-            <a:r>
-              <a:rPr lang="en-US" sz="1400" dirty="0">
-                <a:solidFill>
-                  <a:srgbClr val="000000"/>
-                </a:solidFill>
-              </a:rPr>
-              <a:t>
-</a:t>
-            </a:r>
-            <a:endParaRPr lang="en-US" sz="1400" dirty="0"/>
-          </a:p>
-          <a:p>
-            <a:pPr algn="l" indent="0" marL="0">
-              <a:buNone/>
-            </a:pPr>
-            <a:r>
-              <a:rPr lang="en-US" sz="1100" dirty="0">
-                <a:solidFill>
-                  <a:srgbClr val="000000"/>
-                </a:solidFill>
-              </a:rPr>
-              <a:t>•  55% financial strain
-</a:t>
-            </a:r>
-            <a:pPr algn="l" indent="0" marL="0">
-              <a:buNone/>
-            </a:pPr>
-            <a:r>
-              <a:rPr lang="en-US" sz="1000" i="1" dirty="0">
-                <a:solidFill>
-                  <a:srgbClr val="000000"/>
-                </a:solidFill>
-              </a:rPr>
-              <a:t>•  (2.3× national
-</a:t>
-            </a:r>
-            <a:pPr algn="l" indent="0" marL="0">
-              <a:buNone/>
-            </a:pPr>
-            <a:r>
-              <a:rPr lang="en-US" sz="1000" i="1" dirty="0">
-                <a:solidFill>
-                  <a:srgbClr val="000000"/>
-                </a:solidFill>
-              </a:rPr>
-              <a:t>    average)
-</a:t>
-            </a:r>
-            <a:pPr algn="l" indent="0" marL="0">
-              <a:buNone/>
-            </a:pPr>
-            <a:r>
-              <a:rPr lang="en-US" sz="1100" dirty="0">
-                <a:solidFill>
-                  <a:srgbClr val="000000"/>
-                </a:solidFill>
-              </a:rPr>
-              <a:t>•  Lost income
-</a:t>
-            </a:r>
-            <a:pPr algn="l" indent="0" marL="0">
-              <a:buNone/>
-            </a:pPr>
-            <a:r>
-              <a:rPr lang="en-US" sz="1100" dirty="0">
-                <a:solidFill>
-                  <a:srgbClr val="000000"/>
-                </a:solidFill>
-              </a:rPr>
-              <a:t>    concerns</a:t>
-            </a:r>
-            <a:endParaRPr lang="en-US" sz="1400" dirty="0"/>
+              <a:rPr lang="en-US" sz="1600" b="1" dirty="0">
+                <a:solidFill>
+                  <a:srgbClr val="000000"/>
+                </a:solidFill>
+              </a:rPr>
+              <a:t>Medical Mistrust</a:t>
+            </a:r>
+            <a:endParaRPr lang="en-US" sz="1600" dirty="0"/>
           </a:p>
         </p:txBody>
       </p:sp>
@@ -1324,8 +1186,8 @@
         </p:nvSpPr>
         <p:spPr>
           <a:xfrm>
-            <a:off x="6858000" y="2754630"/>
-            <a:ext cx="2011680" cy="1280160"/>
+            <a:off x="4846320" y="1280160"/>
+            <a:ext cx="3657600" cy="2011680"/>
           </a:xfrm>
           <a:prstGeom prst="rect">
             <a:avLst/>
@@ -1334,40 +1196,58 @@
           <a:ln/>
         </p:spPr>
         <p:txBody>
-          <a:bodyPr wrap="square" rtlCol="0" anchor="t"/>
+          <a:bodyPr wrap="square" rtlCol="0" anchor="ctr"/>
           <a:lstStyle/>
           <a:p>
-            <a:pPr algn="l" indent="0" marL="0">
-              <a:buNone/>
-            </a:pPr>
-            <a:r>
-              <a:rPr lang="en-US" sz="1400" b="1" dirty="0">
-                <a:solidFill>
-                  <a:srgbClr val="000000"/>
-                </a:solidFill>
-              </a:rPr>
-              <a:t>Medical Mistrust
+            <a:pPr indent="0" marL="0">
+              <a:lnSpc>
+                <a:spcPts val="1600"/>
+              </a:lnSpc>
+              <a:buNone/>
+            </a:pPr>
+            <a:r>
+              <a:rPr lang="en-US" sz="1200" dirty="0">
+                <a:solidFill>
+                  <a:srgbClr val="000000"/>
+                </a:solidFill>
+              </a:rPr>
+              <a:t>• Historical awareness of
 </a:t>
             </a:r>
-            <a:endParaRPr lang="en-US" sz="1400" dirty="0"/>
-          </a:p>
-          <a:p>
-            <a:pPr algn="l" indent="0" marL="0">
-              <a:buNone/>
-            </a:pPr>
-            <a:r>
-              <a:rPr lang="en-US" sz="1400" dirty="0">
-                <a:solidFill>
-                  <a:srgbClr val="000000"/>
-                </a:solidFill>
-              </a:rPr>
-              <a:t>
+            <a:pPr indent="0" marL="0">
+              <a:lnSpc>
+                <a:spcPts val="1600"/>
+              </a:lnSpc>
+              <a:buNone/>
+            </a:pPr>
+            <a:r>
+              <a:rPr lang="en-US" sz="1100" dirty="0">
+                <a:solidFill>
+                  <a:srgbClr val="000000"/>
+                </a:solidFill>
+              </a:rPr>
+              <a:t>   healthcare disparities
 </a:t>
             </a:r>
-            <a:endParaRPr lang="en-US" sz="1400" dirty="0"/>
-          </a:p>
-          <a:p>
-            <a:pPr algn="l" indent="0" marL="0">
+            <a:pPr indent="0" marL="0">
+              <a:lnSpc>
+                <a:spcPts val="1600"/>
+              </a:lnSpc>
+              <a:buNone/>
+            </a:pPr>
+            <a:r>
+              <a:rPr lang="en-US" sz="1200" dirty="0">
+                <a:solidFill>
+                  <a:srgbClr val="000000"/>
+                </a:solidFill>
+              </a:rPr>
+              <a:t>• Questioning treatment
+</a:t>
+            </a:r>
+            <a:pPr indent="0" marL="0">
+              <a:lnSpc>
+                <a:spcPts val="1600"/>
+              </a:lnSpc>
               <a:buNone/>
             </a:pPr>
             <a:r>
@@ -1376,57 +1256,39 @@
                   <a:srgbClr val="000000"/>
                 </a:solidFill>
               </a:rPr>
-              <a:t>•  System distrust
+              <a:t>   recommendations
 </a:t>
             </a:r>
-            <a:pPr algn="l" indent="0" marL="0">
-              <a:buNone/>
-            </a:pPr>
-            <a:r>
-              <a:rPr lang="en-US" sz="1100" dirty="0">
-                <a:solidFill>
-                  <a:srgbClr val="000000"/>
-                </a:solidFill>
-              </a:rPr>
-              <a:t>    (36%)
+            <a:pPr indent="0" marL="0">
+              <a:lnSpc>
+                <a:spcPts val="1600"/>
+              </a:lnSpc>
+              <a:buNone/>
+            </a:pPr>
+            <a:r>
+              <a:rPr lang="en-US" sz="1200" dirty="0">
+                <a:solidFill>
+                  <a:srgbClr val="000000"/>
+                </a:solidFill>
+              </a:rPr>
+              <a:t>• Seeking second opinions
 </a:t>
             </a:r>
-            <a:pPr algn="l" indent="0" marL="0">
-              <a:buNone/>
-            </a:pPr>
-            <a:r>
-              <a:rPr lang="en-US" sz="1100" dirty="0">
-                <a:solidFill>
-                  <a:srgbClr val="000000"/>
-                </a:solidFill>
-              </a:rPr>
-              <a:t>•  Historical context
-</a:t>
-            </a:r>
-            <a:pPr algn="l" indent="0" marL="0">
-              <a:buNone/>
-            </a:pPr>
-            <a:r>
-              <a:rPr lang="en-US" sz="1100" dirty="0">
-                <a:solidFill>
-                  <a:srgbClr val="000000"/>
-                </a:solidFill>
-              </a:rPr>
-              <a:t>•  Institutional
-</a:t>
-            </a:r>
-            <a:pPr algn="l" indent="0" marL="0">
-              <a:buNone/>
-            </a:pPr>
-            <a:r>
-              <a:rPr lang="en-US" sz="1100" dirty="0">
-                <a:solidFill>
-                  <a:srgbClr val="000000"/>
-                </a:solidFill>
-              </a:rPr>
-              <a:t>    barriers</a:t>
-            </a:r>
-            <a:endParaRPr lang="en-US" sz="1400" dirty="0"/>
+            <a:pPr indent="0" marL="0">
+              <a:lnSpc>
+                <a:spcPts val="1600"/>
+              </a:lnSpc>
+              <a:buNone/>
+            </a:pPr>
+            <a:r>
+              <a:rPr lang="en-US" sz="1200" dirty="0">
+                <a:solidFill>
+                  <a:srgbClr val="000000"/>
+                </a:solidFill>
+              </a:rPr>
+              <a:t>• Delayed decision-making</a:t>
+            </a:r>
+            <a:endParaRPr lang="en-US" sz="1200" dirty="0"/>
           </a:p>
         </p:txBody>
       </p:sp>
@@ -1438,7 +1300,247 @@
         </p:nvSpPr>
         <p:spPr>
           <a:xfrm>
-            <a:off x="457200" y="4686300"/>
+            <a:off x="1371600" y="1097280"/>
+            <a:ext cx="6400800" cy="365760"/>
+          </a:xfrm>
+          <a:prstGeom prst="rect">
+            <a:avLst/>
+          </a:prstGeom>
+          <a:noFill/>
+          <a:ln/>
+        </p:spPr>
+        <p:txBody>
+          <a:bodyPr wrap="square" rtlCol="0" anchor="ctr"/>
+          <a:lstStyle/>
+          <a:p>
+            <a:pPr algn="ctr" indent="0" marL="0">
+              <a:buNone/>
+            </a:pPr>
+            <a:r>
+              <a:rPr lang="en-US" sz="2200" b="1" dirty="0">
+                <a:solidFill>
+                  <a:srgbClr val="000000"/>
+                </a:solidFill>
+              </a:rPr>
+              <a:t>Interpersonal</a:t>
+            </a:r>
+            <a:endParaRPr lang="en-US" sz="2200" dirty="0"/>
+          </a:p>
+        </p:txBody>
+      </p:sp>
+      <p:sp>
+        <p:nvSpPr>
+          <p:cNvPr id="11" name="Text 9"/>
+          <p:cNvSpPr/>
+          <p:nvPr/>
+        </p:nvSpPr>
+        <p:spPr>
+          <a:xfrm>
+            <a:off x="2011680" y="1645920"/>
+            <a:ext cx="5029200" cy="2286000"/>
+          </a:xfrm>
+          <a:prstGeom prst="rect">
+            <a:avLst/>
+          </a:prstGeom>
+          <a:noFill/>
+          <a:ln/>
+        </p:spPr>
+        <p:txBody>
+          <a:bodyPr wrap="square" rtlCol="0" anchor="ctr"/>
+          <a:lstStyle/>
+          <a:p>
+            <a:pPr indent="0" marL="0">
+              <a:lnSpc>
+                <a:spcPts val="1600"/>
+              </a:lnSpc>
+              <a:buNone/>
+            </a:pPr>
+            <a:r>
+              <a:rPr lang="en-US" sz="1300" b="1" dirty="0">
+                <a:solidFill>
+                  <a:srgbClr val="000000"/>
+                </a:solidFill>
+              </a:rPr>
+              <a:t>Patient-Provider Communication
+</a:t>
+            </a:r>
+            <a:pPr indent="0" marL="0">
+              <a:lnSpc>
+                <a:spcPts val="1600"/>
+              </a:lnSpc>
+              <a:buNone/>
+            </a:pPr>
+            <a:r>
+              <a:rPr lang="en-US" sz="1200" dirty="0">
+                <a:solidFill>
+                  <a:srgbClr val="000000"/>
+                </a:solidFill>
+              </a:rPr>
+              <a:t>• Need for race-concordant visual aids
+</a:t>
+            </a:r>
+            <a:pPr indent="0" marL="0">
+              <a:lnSpc>
+                <a:spcPts val="1600"/>
+              </a:lnSpc>
+              <a:buNone/>
+            </a:pPr>
+            <a:r>
+              <a:rPr lang="en-US" sz="1200" dirty="0">
+                <a:solidFill>
+                  <a:srgbClr val="000000"/>
+                </a:solidFill>
+              </a:rPr>
+              <a:t>• Feeling rushed during consultations
+</a:t>
+            </a:r>
+            <a:pPr indent="0" marL="0">
+              <a:lnSpc>
+                <a:spcPts val="1600"/>
+              </a:lnSpc>
+              <a:buNone/>
+            </a:pPr>
+            <a:r>
+              <a:rPr lang="en-US" sz="1200" dirty="0">
+                <a:solidFill>
+                  <a:srgbClr val="000000"/>
+                </a:solidFill>
+              </a:rPr>
+              <a:t>• Limited options due to clinical factors
+</a:t>
+            </a:r>
+            <a:pPr indent="0" marL="0">
+              <a:lnSpc>
+                <a:spcPts val="1600"/>
+              </a:lnSpc>
+              <a:buNone/>
+            </a:pPr>
+            <a:r>
+              <a:rPr lang="en-US" sz="1100" dirty="0">
+                <a:solidFill>
+                  <a:srgbClr val="000000"/>
+                </a:solidFill>
+              </a:rPr>
+              <a:t>   (BMI, radiation, prior surgery)</a:t>
+            </a:r>
+            <a:endParaRPr lang="en-US" sz="1200" dirty="0"/>
+          </a:p>
+        </p:txBody>
+      </p:sp>
+      <p:sp>
+        <p:nvSpPr>
+          <p:cNvPr id="12" name="Text 10"/>
+          <p:cNvSpPr/>
+          <p:nvPr/>
+        </p:nvSpPr>
+        <p:spPr>
+          <a:xfrm>
+            <a:off x="2286000" y="1920240"/>
+            <a:ext cx="4572000" cy="365760"/>
+          </a:xfrm>
+          <a:prstGeom prst="rect">
+            <a:avLst/>
+          </a:prstGeom>
+          <a:noFill/>
+          <a:ln/>
+        </p:spPr>
+        <p:txBody>
+          <a:bodyPr wrap="square" rtlCol="0" anchor="ctr"/>
+          <a:lstStyle/>
+          <a:p>
+            <a:pPr algn="ctr" indent="0" marL="0">
+              <a:buNone/>
+            </a:pPr>
+            <a:r>
+              <a:rPr lang="en-US" sz="2000" b="1" dirty="0">
+                <a:solidFill>
+                  <a:srgbClr val="000000"/>
+                </a:solidFill>
+              </a:rPr>
+              <a:t>Personal</a:t>
+            </a:r>
+            <a:endParaRPr lang="en-US" sz="2000" dirty="0"/>
+          </a:p>
+        </p:txBody>
+      </p:sp>
+      <p:sp>
+        <p:nvSpPr>
+          <p:cNvPr id="13" name="Text 11"/>
+          <p:cNvSpPr/>
+          <p:nvPr/>
+        </p:nvSpPr>
+        <p:spPr>
+          <a:xfrm>
+            <a:off x="2560320" y="2377440"/>
+            <a:ext cx="4023360" cy="1097280"/>
+          </a:xfrm>
+          <a:prstGeom prst="rect">
+            <a:avLst/>
+          </a:prstGeom>
+          <a:noFill/>
+          <a:ln/>
+        </p:spPr>
+        <p:txBody>
+          <a:bodyPr wrap="square" rtlCol="0" anchor="ctr"/>
+          <a:lstStyle/>
+          <a:p>
+            <a:pPr indent="0" marL="0">
+              <a:lnSpc>
+                <a:spcPts val="1600"/>
+              </a:lnSpc>
+              <a:buNone/>
+            </a:pPr>
+            <a:r>
+              <a:rPr lang="en-US" sz="1200" dirty="0">
+                <a:solidFill>
+                  <a:srgbClr val="000000"/>
+                </a:solidFill>
+              </a:rPr>
+              <a:t>• Desire to maintain feminine identity
+</a:t>
+            </a:r>
+            <a:pPr indent="0" marL="0">
+              <a:lnSpc>
+                <a:spcPts val="1600"/>
+              </a:lnSpc>
+              <a:buNone/>
+            </a:pPr>
+            <a:r>
+              <a:rPr lang="en-US" sz="1200" dirty="0">
+                <a:solidFill>
+                  <a:srgbClr val="000000"/>
+                </a:solidFill>
+              </a:rPr>
+              <a:t>• Clinical eligibility concerns
+</a:t>
+            </a:r>
+            <a:pPr indent="0" marL="0">
+              <a:lnSpc>
+                <a:spcPts val="1600"/>
+              </a:lnSpc>
+              <a:buNone/>
+            </a:pPr>
+            <a:r>
+              <a:rPr lang="en-US" sz="1200" dirty="0">
+                <a:solidFill>
+                  <a:srgbClr val="000000"/>
+                </a:solidFill>
+              </a:rPr>
+              <a:t>• Body image and self-perception</a:t>
+            </a:r>
+            <a:endParaRPr lang="en-US" sz="1200" dirty="0"/>
+          </a:p>
+        </p:txBody>
+      </p:sp>
+      <p:sp>
+        <p:nvSpPr>
+          <p:cNvPr id="14" name="Text 12"/>
+          <p:cNvSpPr/>
+          <p:nvPr/>
+        </p:nvSpPr>
+        <p:spPr>
+          <a:xfrm>
+            <a:off x="457200" y="5120640"/>
             <a:ext cx="8229600" cy="274320"/>
           </a:xfrm>
           <a:prstGeom prst="rect">
@@ -1455,14 +1557,14 @@
               <a:buNone/>
             </a:pPr>
             <a:r>
-              <a:rPr lang="en-US" sz="1200" i="1" dirty="0">
-                <a:solidFill>
-                  <a:srgbClr val="000000"/>
+              <a:rPr lang="en-US" sz="1100" i="1" dirty="0">
+                <a:solidFill>
+                  <a:srgbClr val="333333"/>
                 </a:solidFill>
               </a:rPr>
               <a:t>Adapted from McLeroy et al. (1988) Ecological Framework</a:t>
             </a:r>
-            <a:endParaRPr lang="en-US" sz="1200" dirty="0"/>
+            <a:endParaRPr lang="en-US" sz="1100" dirty="0"/>
           </a:p>
         </p:txBody>
       </p:sp>
